--- a/test/I2_Query_Flow.pptx
+++ b/test/I2_Query_Flow.pptx
@@ -4341,8 +4341,9 @@
                   <a:srgbClr val="175CA6"/>
                 </a:solidFill>
               </a:rPr>
-              <a:t>prompt +
-snapshot</a:t>
+              <a:t>SYSTEM_PROMPT
++ snapshot
++ history</a:t>
             </a:r>
           </a:p>
         </p:txBody>
@@ -6606,7 +6607,7 @@
                   <a:srgbClr val="444444"/>
                 </a:solidFill>
               </a:rPr>
-              <a:t>GET /alerts?alert_type=SINR_LOW on Controller</a:t>
+              <a:t>Direct Flux query on InfluxDB: SINR_LOW alerts; yields *[calling tool: get_alerts...]* inline</a:t>
             </a:r>
           </a:p>
         </p:txBody>
@@ -6705,7 +6706,7 @@
             <a:avLst/>
           </a:prstGeom>
           <a:solidFill>
-            <a:srgbClr val="007E8A"/>
+            <a:srgbClr val="444444"/>
           </a:solidFill>
           <a:ln w="3810">
             <a:solidFill>
@@ -6764,7 +6765,7 @@
                   <a:srgbClr val="FFFFFF"/>
                 </a:solidFill>
               </a:rPr>
-              <a:t>Controller</a:t>
+              <a:t>InfluxDB</a:t>
             </a:r>
           </a:p>
         </p:txBody>
@@ -6798,7 +6799,7 @@
                   <a:srgbClr val="444444"/>
                 </a:solidFill>
               </a:rPr>
-              <a:t>Queries InfluxDB alerts: SINR_LOW records</a:t>
+              <a:t>Returns SINR_LOW records with cell_id, severity, confidence</a:t>
             </a:r>
           </a:p>
         </p:txBody>
@@ -6990,7 +6991,7 @@
                   <a:srgbClr val="444444"/>
                 </a:solidFill>
               </a:rPr>
-              <a:t>Returns SINR_LOW alert list to Gemini</a:t>
+              <a:t>JSON-sanitises; appends FunctionResponse to session history; re-calls Gemini [iteration 2]</a:t>
             </a:r>
           </a:p>
         </p:txBody>
@@ -7182,7 +7183,7 @@
                   <a:srgbClr val="444444"/>
                 </a:solidFill>
               </a:rPr>
-              <a:t>Tool call 2: query_network() — get sinr_db + cell locations</a:t>
+              <a:t>Tool call 2: query_network() — confirm sinr_db values + cell locations</a:t>
             </a:r>
           </a:p>
         </p:txBody>
@@ -7374,7 +7375,7 @@
                   <a:srgbClr val="444444"/>
                 </a:solidFill>
               </a:rPr>
-              <a:t>GET /network → Controller → topology.json + InfluxDB</a:t>
+              <a:t>GET /network → Controller; yields *[calling tool: query_network...]* inline</a:t>
             </a:r>
           </a:p>
         </p:txBody>
@@ -7566,7 +7567,7 @@
                   <a:srgbClr val="444444"/>
                 </a:solidFill>
               </a:rPr>
-              <a:t>Returns full network snapshot to Gemini</a:t>
+              <a:t>JSON-sanitises; appends FunctionResponse; re-calls Gemini [iteration 3]</a:t>
             </a:r>
           </a:p>
         </p:txBody>
@@ -8334,7 +8335,7 @@
                   <a:srgbClr val="444444"/>
                 </a:solidFill>
               </a:rPr>
-              <a:t>Atomically updates topology.json</a:t>
+              <a:t>Atomically updates topology.json (.tmp → rename); DU simulators reload in 5 s</a:t>
             </a:r>
           </a:p>
         </p:txBody>
@@ -8433,7 +8434,7 @@
             <a:avLst/>
           </a:prstGeom>
           <a:solidFill>
-            <a:srgbClr val="5A238C"/>
+            <a:srgbClr val="0A2955"/>
           </a:solidFill>
           <a:ln w="3810">
             <a:solidFill>
@@ -8492,7 +8493,7 @@
                   <a:srgbClr val="FFFFFF"/>
                 </a:solidFill>
               </a:rPr>
-              <a:t>Gemini LLM</a:t>
+              <a:t>Orchestrator</a:t>
             </a:r>
           </a:p>
         </p:txBody>
@@ -8526,7 +8527,7 @@
                   <a:srgbClr val="444444"/>
                 </a:solidFill>
               </a:rPr>
-              <a:t>Generates: SINR diagnosis, cells moved, expected improvement</a:t>
+              <a:t>JSON-sanitises; appends to history; re-calls Gemini → loop exits; streams reply</a:t>
             </a:r>
           </a:p>
         </p:txBody>
